--- a/チーム制作.pptx
+++ b/チーム制作.pptx
@@ -264,7 +264,7 @@
           <a:p>
             <a:fld id="{547CC97B-8179-4C3C-8FE0-445FAAAAB514}" type="datetimeFigureOut">
               <a:rPr kumimoji="1" lang="ja-JP" altLang="en-US" smtClean="0"/>
-              <a:t>2026/10/16</a:t>
+              <a:t>2026/10/19</a:t>
             </a:fld>
             <a:endParaRPr kumimoji="1" lang="ja-JP" altLang="en-US"/>
           </a:p>
@@ -494,7 +494,7 @@
           <a:p>
             <a:fld id="{547CC97B-8179-4C3C-8FE0-445FAAAAB514}" type="datetimeFigureOut">
               <a:rPr kumimoji="1" lang="ja-JP" altLang="en-US" smtClean="0"/>
-              <a:t>2026/10/16</a:t>
+              <a:t>2026/10/19</a:t>
             </a:fld>
             <a:endParaRPr kumimoji="1" lang="ja-JP" altLang="en-US"/>
           </a:p>
@@ -734,7 +734,7 @@
           <a:p>
             <a:fld id="{547CC97B-8179-4C3C-8FE0-445FAAAAB514}" type="datetimeFigureOut">
               <a:rPr kumimoji="1" lang="ja-JP" altLang="en-US" smtClean="0"/>
-              <a:t>2026/10/16</a:t>
+              <a:t>2026/10/19</a:t>
             </a:fld>
             <a:endParaRPr kumimoji="1" lang="ja-JP" altLang="en-US"/>
           </a:p>
@@ -964,7 +964,7 @@
           <a:p>
             <a:fld id="{547CC97B-8179-4C3C-8FE0-445FAAAAB514}" type="datetimeFigureOut">
               <a:rPr kumimoji="1" lang="ja-JP" altLang="en-US" smtClean="0"/>
-              <a:t>2026/10/16</a:t>
+              <a:t>2026/10/19</a:t>
             </a:fld>
             <a:endParaRPr kumimoji="1" lang="ja-JP" altLang="en-US"/>
           </a:p>
@@ -1239,7 +1239,7 @@
           <a:p>
             <a:fld id="{547CC97B-8179-4C3C-8FE0-445FAAAAB514}" type="datetimeFigureOut">
               <a:rPr kumimoji="1" lang="ja-JP" altLang="en-US" smtClean="0"/>
-              <a:t>2026/10/16</a:t>
+              <a:t>2026/10/19</a:t>
             </a:fld>
             <a:endParaRPr kumimoji="1" lang="ja-JP" altLang="en-US"/>
           </a:p>
@@ -1568,7 +1568,7 @@
           <a:p>
             <a:fld id="{547CC97B-8179-4C3C-8FE0-445FAAAAB514}" type="datetimeFigureOut">
               <a:rPr kumimoji="1" lang="ja-JP" altLang="en-US" smtClean="0"/>
-              <a:t>2026/10/16</a:t>
+              <a:t>2026/10/19</a:t>
             </a:fld>
             <a:endParaRPr kumimoji="1" lang="ja-JP" altLang="en-US"/>
           </a:p>
@@ -2044,7 +2044,7 @@
           <a:p>
             <a:fld id="{547CC97B-8179-4C3C-8FE0-445FAAAAB514}" type="datetimeFigureOut">
               <a:rPr kumimoji="1" lang="ja-JP" altLang="en-US" smtClean="0"/>
-              <a:t>2026/10/16</a:t>
+              <a:t>2026/10/19</a:t>
             </a:fld>
             <a:endParaRPr kumimoji="1" lang="ja-JP" altLang="en-US"/>
           </a:p>
@@ -2185,7 +2185,7 @@
           <a:p>
             <a:fld id="{547CC97B-8179-4C3C-8FE0-445FAAAAB514}" type="datetimeFigureOut">
               <a:rPr kumimoji="1" lang="ja-JP" altLang="en-US" smtClean="0"/>
-              <a:t>2026/10/16</a:t>
+              <a:t>2026/10/19</a:t>
             </a:fld>
             <a:endParaRPr kumimoji="1" lang="ja-JP" altLang="en-US"/>
           </a:p>
@@ -2298,7 +2298,7 @@
           <a:p>
             <a:fld id="{547CC97B-8179-4C3C-8FE0-445FAAAAB514}" type="datetimeFigureOut">
               <a:rPr kumimoji="1" lang="ja-JP" altLang="en-US" smtClean="0"/>
-              <a:t>2026/10/16</a:t>
+              <a:t>2026/10/19</a:t>
             </a:fld>
             <a:endParaRPr kumimoji="1" lang="ja-JP" altLang="en-US"/>
           </a:p>
@@ -2641,7 +2641,7 @@
           <a:p>
             <a:fld id="{547CC97B-8179-4C3C-8FE0-445FAAAAB514}" type="datetimeFigureOut">
               <a:rPr kumimoji="1" lang="ja-JP" altLang="en-US" smtClean="0"/>
-              <a:t>2026/10/16</a:t>
+              <a:t>2026/10/19</a:t>
             </a:fld>
             <a:endParaRPr kumimoji="1" lang="ja-JP" altLang="en-US"/>
           </a:p>
@@ -2929,7 +2929,7 @@
           <a:p>
             <a:fld id="{547CC97B-8179-4C3C-8FE0-445FAAAAB514}" type="datetimeFigureOut">
               <a:rPr kumimoji="1" lang="ja-JP" altLang="en-US" smtClean="0"/>
-              <a:t>2026/10/16</a:t>
+              <a:t>2026/10/19</a:t>
             </a:fld>
             <a:endParaRPr kumimoji="1" lang="ja-JP" altLang="en-US"/>
           </a:p>
@@ -3202,7 +3202,7 @@
           <a:p>
             <a:fld id="{547CC97B-8179-4C3C-8FE0-445FAAAAB514}" type="datetimeFigureOut">
               <a:rPr kumimoji="1" lang="ja-JP" altLang="en-US" smtClean="0"/>
-              <a:t>2026/10/16</a:t>
+              <a:t>2026/10/19</a:t>
             </a:fld>
             <a:endParaRPr kumimoji="1" lang="ja-JP" altLang="en-US"/>
           </a:p>
@@ -3881,83 +3881,137 @@
             <p:ph idx="1"/>
           </p:nvPr>
         </p:nvSpPr>
-        <p:spPr/>
+        <p:spPr>
+          <a:xfrm>
+            <a:off x="838200" y="1825625"/>
+            <a:ext cx="11049000" cy="4351338"/>
+          </a:xfrm>
+        </p:spPr>
         <p:txBody>
           <a:bodyPr>
-            <a:normAutofit fontScale="92500" lnSpcReduction="10000"/>
+            <a:normAutofit lnSpcReduction="10000"/>
           </a:bodyPr>
           <a:lstStyle/>
           <a:p>
             <a:r>
+              <a:rPr kumimoji="1" lang="ja-JP" altLang="en-US" dirty="0" smtClean="0"/>
+              <a:t>ソロ</a:t>
+            </a:r>
+            <a:endParaRPr kumimoji="1" lang="en-US" altLang="ja-JP" dirty="0"/>
+          </a:p>
+          <a:p>
+            <a:pPr marL="0" indent="0">
+              <a:buNone/>
+            </a:pPr>
+            <a:r>
               <a:rPr kumimoji="1" lang="ja-JP" altLang="en-US" dirty="0"/>
-              <a:t>自動スクロールのアクションゲーム</a:t>
-            </a:r>
-            <a:br>
-              <a:rPr kumimoji="1" lang="en-US" altLang="ja-JP" dirty="0"/>
-            </a:br>
-            <a:r>
-              <a:rPr kumimoji="1" lang="ja-JP" altLang="en-US" dirty="0"/>
-              <a:t>ソロとマルチプレイの</a:t>
-            </a:r>
-            <a:r>
-              <a:rPr kumimoji="1" lang="en-US" altLang="ja-JP" dirty="0"/>
-              <a:t>2</a:t>
-            </a:r>
-            <a:r>
-              <a:rPr kumimoji="1" lang="ja-JP" altLang="en-US" dirty="0"/>
-              <a:t>つのモードがある</a:t>
+              <a:t>プレイヤーは上からくる障害物を</a:t>
+            </a:r>
+            <a:r>
+              <a:rPr kumimoji="1" lang="ja-JP" altLang="en-US" dirty="0" smtClean="0"/>
+              <a:t>避けながらコインを集め</a:t>
+            </a:r>
+            <a:r>
+              <a:rPr lang="ja-JP" altLang="en-US" dirty="0" smtClean="0"/>
+              <a:t>る</a:t>
+            </a:r>
+            <a:endParaRPr lang="en-US" altLang="ja-JP" dirty="0" smtClean="0"/>
+          </a:p>
+          <a:p>
+            <a:pPr marL="0" indent="0">
+              <a:buNone/>
+            </a:pPr>
+            <a:r>
+              <a:rPr lang="ja-JP" altLang="en-US" dirty="0"/>
+              <a:t>進んだ</a:t>
+            </a:r>
+            <a:r>
+              <a:rPr lang="ja-JP" altLang="en-US" dirty="0" smtClean="0"/>
+              <a:t>距離と集めたコインの枚数でスコアが変動する</a:t>
+            </a:r>
+            <a:endParaRPr lang="en-US" altLang="ja-JP" dirty="0" smtClean="0"/>
+          </a:p>
+          <a:p>
+            <a:pPr marL="0" indent="0">
+              <a:buNone/>
+            </a:pPr>
+            <a:r>
+              <a:rPr lang="ja-JP" altLang="en-US" dirty="0" smtClean="0"/>
+              <a:t>障害物</a:t>
+            </a:r>
+            <a:r>
+              <a:rPr lang="ja-JP" altLang="en-US" dirty="0"/>
+              <a:t>に当たった</a:t>
+            </a:r>
+            <a:r>
+              <a:rPr lang="ja-JP" altLang="en-US" dirty="0" smtClean="0"/>
+              <a:t>時点</a:t>
+            </a:r>
+            <a:r>
+              <a:rPr lang="ja-JP" altLang="en-US" dirty="0" smtClean="0"/>
+              <a:t>の</a:t>
+            </a:r>
+            <a:r>
+              <a:rPr lang="ja-JP" altLang="en-US" dirty="0" smtClean="0"/>
+              <a:t>スコアが記録される</a:t>
+            </a:r>
+            <a:r>
+              <a:rPr lang="en-US" altLang="ja-JP" dirty="0" smtClean="0"/>
+              <a:t>(</a:t>
+            </a:r>
+            <a:r>
+              <a:rPr lang="ja-JP" altLang="en-US" dirty="0" smtClean="0"/>
+              <a:t>ランキング形式</a:t>
+            </a:r>
+            <a:r>
+              <a:rPr lang="en-US" altLang="ja-JP" dirty="0" smtClean="0"/>
+              <a:t>)</a:t>
             </a:r>
             <a:endParaRPr kumimoji="1" lang="en-US" altLang="ja-JP" dirty="0"/>
           </a:p>
           <a:p>
-            <a:endParaRPr kumimoji="1" lang="en-US" altLang="ja-JP" dirty="0"/>
-          </a:p>
-          <a:p>
-            <a:r>
-              <a:rPr kumimoji="1" lang="ja-JP" altLang="en-US" dirty="0"/>
-              <a:t>ソロ</a:t>
-            </a:r>
-            <a:endParaRPr kumimoji="1" lang="en-US" altLang="ja-JP" dirty="0"/>
+            <a:endParaRPr lang="en-US" altLang="ja-JP" dirty="0"/>
+          </a:p>
+          <a:p>
+            <a:r>
+              <a:rPr kumimoji="1" lang="ja-JP" altLang="en-US" dirty="0" smtClean="0"/>
+              <a:t>マルチ</a:t>
+            </a:r>
+            <a:endParaRPr lang="en-US" altLang="ja-JP" dirty="0"/>
           </a:p>
           <a:p>
             <a:pPr marL="0" indent="0">
               <a:buNone/>
             </a:pPr>
             <a:r>
-              <a:rPr kumimoji="1" lang="ja-JP" altLang="en-US" dirty="0"/>
-              <a:t>プレイヤーは上からくる障害物を避けながらどれだけ遠い地点　　　に到達できるかを競う</a:t>
+              <a:rPr lang="ja-JP" altLang="en-US" dirty="0"/>
+              <a:t>プレイヤー同士がぶつかる</a:t>
+            </a:r>
+            <a:r>
+              <a:rPr lang="ja-JP" altLang="en-US" dirty="0" smtClean="0"/>
+              <a:t>とノックバックする</a:t>
+            </a:r>
+            <a:endParaRPr lang="en-US" altLang="ja-JP" dirty="0" smtClean="0"/>
+          </a:p>
+          <a:p>
+            <a:pPr marL="0" indent="0">
+              <a:buNone/>
+            </a:pPr>
+            <a:r>
+              <a:rPr lang="ja-JP" altLang="en-US" dirty="0" smtClean="0"/>
+              <a:t>ダッシュ時は相手が大きくノックバックする</a:t>
+            </a:r>
+            <a:endParaRPr lang="en-US" altLang="ja-JP" dirty="0" smtClean="0"/>
+          </a:p>
+          <a:p>
+            <a:pPr marL="0" indent="0">
+              <a:buNone/>
+            </a:pPr>
+            <a:r>
+              <a:rPr lang="ja-JP" altLang="en-US" dirty="0" smtClean="0"/>
+              <a:t>お互いフェイントをかけあって相手を障害物に当てたら勝ち</a:t>
             </a:r>
             <a:endParaRPr lang="en-US" altLang="ja-JP" dirty="0"/>
-          </a:p>
-          <a:p>
-            <a:pPr marL="0" indent="0">
-              <a:buNone/>
-            </a:pPr>
-            <a:r>
-              <a:rPr lang="ja-JP" altLang="en-US" dirty="0"/>
-              <a:t>障害物に当たった時点での進んだ距離がスコアとして記録される</a:t>
-            </a:r>
-            <a:endParaRPr kumimoji="1" lang="en-US" altLang="ja-JP" dirty="0"/>
-          </a:p>
-          <a:p>
-            <a:endParaRPr lang="en-US" altLang="ja-JP" dirty="0"/>
-          </a:p>
-          <a:p>
-            <a:r>
-              <a:rPr kumimoji="1" lang="ja-JP" altLang="en-US" dirty="0"/>
-              <a:t>マルチ</a:t>
-            </a:r>
-            <a:endParaRPr lang="en-US" altLang="ja-JP" dirty="0"/>
-          </a:p>
-          <a:p>
-            <a:pPr marL="0" indent="0">
-              <a:buNone/>
-            </a:pPr>
-            <a:r>
-              <a:rPr kumimoji="1" lang="ja-JP" altLang="en-US" dirty="0"/>
-              <a:t>一旦保留</a:t>
-            </a:r>
-            <a:endParaRPr kumimoji="1" lang="en-US" altLang="ja-JP" dirty="0"/>
           </a:p>
         </p:txBody>
       </p:sp>
@@ -4073,12 +4127,19 @@
               <a:t>方向転換</a:t>
             </a:r>
             <a:r>
-              <a:rPr lang="en-US" altLang="ja-JP" dirty="0"/>
+              <a:rPr lang="en-US" altLang="ja-JP" dirty="0" smtClean="0"/>
               <a:t>:</a:t>
             </a:r>
             <a:r>
-              <a:rPr lang="ja-JP" altLang="en-US" dirty="0"/>
-              <a:t>左クリック</a:t>
+              <a:rPr lang="ja-JP" altLang="en-US" dirty="0" smtClean="0"/>
+              <a:t>スペース</a:t>
+            </a:r>
+            <a:endParaRPr lang="en-US" altLang="ja-JP" dirty="0" smtClean="0"/>
+          </a:p>
+          <a:p>
+            <a:r>
+              <a:rPr kumimoji="1" lang="ja-JP" altLang="en-US" dirty="0" smtClean="0"/>
+              <a:t>ダッシュ：シフト</a:t>
             </a:r>
             <a:endParaRPr kumimoji="1" lang="ja-JP" altLang="en-US" dirty="0"/>
           </a:p>
@@ -4202,39 +4263,63 @@
               <a:t>方向転換</a:t>
             </a:r>
             <a:r>
-              <a:rPr lang="en-US" altLang="ja-JP" dirty="0"/>
+              <a:rPr lang="en-US" altLang="ja-JP" dirty="0" smtClean="0"/>
               <a:t>:</a:t>
             </a:r>
             <a:r>
-              <a:rPr lang="ja-JP" altLang="en-US" dirty="0"/>
+              <a:rPr lang="ja-JP" altLang="en-US" dirty="0" smtClean="0"/>
+              <a:t>スペース</a:t>
+            </a:r>
+            <a:r>
+              <a:rPr lang="en-US" altLang="ja-JP" dirty="0" smtClean="0"/>
+              <a:t>(P1)</a:t>
+            </a:r>
+            <a:r>
+              <a:rPr lang="ja-JP" altLang="en-US" dirty="0" smtClean="0"/>
               <a:t>左クリック</a:t>
             </a:r>
+            <a:r>
+              <a:rPr lang="en-US" altLang="ja-JP" dirty="0" smtClean="0"/>
+              <a:t>(P2)</a:t>
+            </a:r>
             <a:endParaRPr lang="en-US" altLang="ja-JP" dirty="0"/>
           </a:p>
           <a:p>
             <a:r>
-              <a:rPr kumimoji="1" lang="ja-JP" altLang="en-US" dirty="0"/>
-              <a:t>アイテム使用</a:t>
-            </a:r>
-            <a:r>
-              <a:rPr kumimoji="1" lang="en-US" altLang="ja-JP" dirty="0">
+              <a:rPr lang="ja-JP" altLang="en-US" dirty="0" smtClean="0">
+                <a:sym typeface="Wingdings" panose="05000000000000000000" pitchFamily="2" charset="2"/>
+              </a:rPr>
+              <a:t>ダッシュ</a:t>
+            </a:r>
+            <a:r>
+              <a:rPr lang="en-US" altLang="ja-JP" dirty="0" smtClean="0">
                 <a:sym typeface="Wingdings" panose="05000000000000000000" pitchFamily="2" charset="2"/>
               </a:rPr>
               <a:t>:</a:t>
             </a:r>
-          </a:p>
-          <a:p>
-            <a:r>
-              <a:rPr lang="ja-JP" altLang="en-US" dirty="0">
+            <a:r>
+              <a:rPr lang="ja-JP" altLang="en-US" dirty="0" smtClean="0">
                 <a:sym typeface="Wingdings" panose="05000000000000000000" pitchFamily="2" charset="2"/>
               </a:rPr>
-              <a:t>ダッシュ</a:t>
-            </a:r>
-            <a:r>
-              <a:rPr lang="en-US" altLang="ja-JP" dirty="0">
+              <a:t>シフト</a:t>
+            </a:r>
+            <a:r>
+              <a:rPr lang="en-US" altLang="ja-JP" dirty="0" smtClean="0">
                 <a:sym typeface="Wingdings" panose="05000000000000000000" pitchFamily="2" charset="2"/>
               </a:rPr>
-              <a:t>:</a:t>
+              <a:t>(P1)</a:t>
+            </a:r>
+            <a:r>
+              <a:rPr lang="ja-JP" altLang="en-US" dirty="0" smtClean="0">
+                <a:sym typeface="Wingdings" panose="05000000000000000000" pitchFamily="2" charset="2"/>
+              </a:rPr>
+              <a:t>右クリック</a:t>
+            </a:r>
+            <a:r>
+              <a:rPr lang="en-US" altLang="ja-JP" dirty="0" smtClean="0">
+                <a:sym typeface="Wingdings" panose="05000000000000000000" pitchFamily="2" charset="2"/>
+              </a:rPr>
+              <a:t>(P2)</a:t>
             </a:r>
             <a:endParaRPr kumimoji="1" lang="ja-JP" altLang="en-US" dirty="0"/>
           </a:p>
@@ -4272,13 +4357,7 @@
       </p:grpSpPr>
       <p:sp>
         <p:nvSpPr>
-          <p:cNvPr id="2" name="タイトル 1">
-            <a:extLst>
-              <a:ext uri="{FF2B5EF4-FFF2-40B4-BE49-F238E27FC236}">
-                <a16:creationId xmlns:a16="http://schemas.microsoft.com/office/drawing/2014/main" id="{9E133143-5922-93CB-E0FE-00BE1F544703}"/>
-              </a:ext>
-            </a:extLst>
-          </p:cNvPr>
+          <p:cNvPr id="2" name="タイトル 1"/>
           <p:cNvSpPr>
             <a:spLocks noGrp="1"/>
           </p:cNvSpPr>
@@ -4292,51 +4371,54 @@
           <a:lstStyle/>
           <a:p>
             <a:r>
-              <a:rPr kumimoji="1" lang="ja-JP" altLang="en-US" dirty="0"/>
-              <a:t>イメージ</a:t>
-            </a:r>
-          </a:p>
-        </p:txBody>
-      </p:sp>
-      <p:pic>
-        <p:nvPicPr>
-          <p:cNvPr id="4" name="コンテンツ プレースホルダー 3">
-            <a:extLst>
-              <a:ext uri="{FF2B5EF4-FFF2-40B4-BE49-F238E27FC236}">
-                <a16:creationId xmlns:a16="http://schemas.microsoft.com/office/drawing/2014/main" id="{F29F1B40-99E3-1DC1-1492-117AA90694FB}"/>
-              </a:ext>
-              <a:ext uri="{C183D7F6-B498-43B3-948B-1728B52AA6E4}">
-                <adec:decorative xmlns:adec="http://schemas.microsoft.com/office/drawing/2017/decorative" val="1"/>
-              </a:ext>
-            </a:extLst>
-          </p:cNvPr>
-          <p:cNvPicPr>
-            <a:picLocks noGrp="1" noChangeAspect="1"/>
-          </p:cNvPicPr>
+              <a:rPr kumimoji="1" lang="ja-JP" altLang="en-US" dirty="0" smtClean="0"/>
+              <a:t>考え中の要素</a:t>
+            </a:r>
+            <a:endParaRPr kumimoji="1" lang="ja-JP" altLang="en-US" dirty="0"/>
+          </a:p>
+        </p:txBody>
+      </p:sp>
+      <p:sp>
+        <p:nvSpPr>
+          <p:cNvPr id="3" name="コンテンツ プレースホルダー 2"/>
+          <p:cNvSpPr>
+            <a:spLocks noGrp="1"/>
+          </p:cNvSpPr>
           <p:nvPr>
             <p:ph idx="1"/>
           </p:nvPr>
-        </p:nvPicPr>
-        <p:blipFill>
-          <a:blip r:embed="rId2"/>
-          <a:stretch>
-            <a:fillRect/>
-          </a:stretch>
-        </p:blipFill>
-        <p:spPr>
-          <a:xfrm>
-            <a:off x="838200" y="1505243"/>
-            <a:ext cx="2982294" cy="4844841"/>
-          </a:xfrm>
-          <a:prstGeom prst="rect">
-            <a:avLst/>
-          </a:prstGeom>
-        </p:spPr>
-      </p:pic>
+        </p:nvSpPr>
+        <p:spPr/>
+        <p:txBody>
+          <a:bodyPr/>
+          <a:lstStyle/>
+          <a:p>
+            <a:r>
+              <a:rPr kumimoji="1" lang="ja-JP" altLang="en-US" dirty="0" smtClean="0"/>
+              <a:t>マルチの際のアイテムの追加</a:t>
+            </a:r>
+            <a:endParaRPr kumimoji="1" lang="en-US" altLang="ja-JP" dirty="0" smtClean="0"/>
+          </a:p>
+          <a:p>
+            <a:pPr marL="0" indent="0">
+              <a:buNone/>
+            </a:pPr>
+            <a:r>
+              <a:rPr lang="ja-JP" altLang="en-US" dirty="0"/>
+              <a:t>移動速度が</a:t>
+            </a:r>
+            <a:r>
+              <a:rPr lang="ja-JP" altLang="en-US" dirty="0" smtClean="0"/>
+              <a:t>上がったり、ノックバックが軽減されたりなど</a:t>
+            </a:r>
+            <a:endParaRPr kumimoji="1" lang="ja-JP" altLang="en-US" dirty="0"/>
+          </a:p>
+        </p:txBody>
+      </p:sp>
     </p:spTree>
     <p:extLst>
       <p:ext uri="{BB962C8B-B14F-4D97-AF65-F5344CB8AC3E}">
-        <p14:creationId xmlns:p14="http://schemas.microsoft.com/office/powerpoint/2010/main" val="2734368422"/>
+        <p14:creationId xmlns:p14="http://schemas.microsoft.com/office/powerpoint/2010/main" val="951739103"/>
       </p:ext>
     </p:extLst>
   </p:cSld>

--- a/チーム制作.pptx
+++ b/チーム制作.pptx
@@ -4397,21 +4397,41 @@
               <a:rPr kumimoji="1" lang="ja-JP" altLang="en-US" dirty="0" smtClean="0"/>
               <a:t>マルチの際のアイテムの追加</a:t>
             </a:r>
+            <a:endParaRPr lang="en-US" altLang="ja-JP" dirty="0"/>
+          </a:p>
+          <a:p>
+            <a:pPr marL="0" indent="0">
+              <a:buNone/>
+            </a:pPr>
+            <a:r>
+              <a:rPr lang="ja-JP" altLang="en-US" dirty="0"/>
+              <a:t>移動速度が上がったり、ノックバックが軽減されたり</a:t>
+            </a:r>
+            <a:r>
+              <a:rPr lang="ja-JP" altLang="en-US" dirty="0" smtClean="0"/>
+              <a:t>など</a:t>
+            </a:r>
             <a:endParaRPr kumimoji="1" lang="en-US" altLang="ja-JP" dirty="0" smtClean="0"/>
           </a:p>
           <a:p>
-            <a:pPr marL="0" indent="0">
-              <a:buNone/>
-            </a:pPr>
-            <a:r>
-              <a:rPr lang="ja-JP" altLang="en-US" dirty="0"/>
-              <a:t>移動速度が</a:t>
-            </a:r>
-            <a:r>
-              <a:rPr lang="ja-JP" altLang="en-US" dirty="0" smtClean="0"/>
-              <a:t>上がったり、ノックバックが軽減されたりなど</a:t>
-            </a:r>
-            <a:endParaRPr kumimoji="1" lang="ja-JP" altLang="en-US" dirty="0"/>
+            <a:endParaRPr kumimoji="1" lang="en-US" altLang="ja-JP" dirty="0" smtClean="0"/>
+          </a:p>
+          <a:p>
+            <a:r>
+              <a:rPr kumimoji="1" lang="ja-JP" altLang="en-US" dirty="0" smtClean="0"/>
+              <a:t>時間経過で速度が上昇</a:t>
+            </a:r>
+            <a:endParaRPr kumimoji="1" lang="en-US" altLang="ja-JP" dirty="0" smtClean="0"/>
+          </a:p>
+          <a:p>
+            <a:endParaRPr lang="en-US" altLang="ja-JP" dirty="0"/>
+          </a:p>
+          <a:p>
+            <a:r>
+              <a:rPr kumimoji="1" lang="ja-JP" altLang="en-US" dirty="0" smtClean="0"/>
+              <a:t>開発者は無敵</a:t>
+            </a:r>
+            <a:endParaRPr kumimoji="1" lang="en-US" altLang="ja-JP" dirty="0" smtClean="0"/>
           </a:p>
         </p:txBody>
       </p:sp>

--- a/チーム制作.pptx
+++ b/チーム制作.pptx
@@ -4423,16 +4423,6 @@
             </a:r>
             <a:endParaRPr kumimoji="1" lang="en-US" altLang="ja-JP" dirty="0" smtClean="0"/>
           </a:p>
-          <a:p>
-            <a:endParaRPr lang="en-US" altLang="ja-JP" dirty="0"/>
-          </a:p>
-          <a:p>
-            <a:r>
-              <a:rPr kumimoji="1" lang="ja-JP" altLang="en-US" dirty="0" smtClean="0"/>
-              <a:t>開発者は無敵</a:t>
-            </a:r>
-            <a:endParaRPr kumimoji="1" lang="en-US" altLang="ja-JP" dirty="0" smtClean="0"/>
-          </a:p>
         </p:txBody>
       </p:sp>
     </p:spTree>

--- a/チーム制作.pptx
+++ b/チーム制作.pptx
@@ -8,9 +8,7 @@
     <p:sldId id="256" r:id="rId2"/>
     <p:sldId id="257" r:id="rId3"/>
     <p:sldId id="258" r:id="rId4"/>
-    <p:sldId id="259" r:id="rId5"/>
-    <p:sldId id="260" r:id="rId6"/>
-    <p:sldId id="261" r:id="rId7"/>
+    <p:sldId id="261" r:id="rId5"/>
   </p:sldIdLst>
   <p:sldSz cx="12192000" cy="6858000"/>
   <p:notesSz cx="6858000" cy="9144000"/>
@@ -3727,9 +3725,10 @@
           <a:lstStyle/>
           <a:p>
             <a:r>
-              <a:rPr kumimoji="1" lang="ja-JP" altLang="en-US" dirty="0"/>
-              <a:t>概要</a:t>
-            </a:r>
+              <a:rPr lang="ja-JP" altLang="en-US" dirty="0"/>
+              <a:t>開発環境</a:t>
+            </a:r>
+            <a:endParaRPr kumimoji="1" lang="ja-JP" altLang="en-US" dirty="0"/>
           </a:p>
         </p:txBody>
       </p:sp>
@@ -3859,9 +3858,10 @@
           <a:lstStyle/>
           <a:p>
             <a:r>
-              <a:rPr kumimoji="1" lang="ja-JP" altLang="en-US" dirty="0"/>
-              <a:t>説明</a:t>
-            </a:r>
+              <a:rPr lang="ja-JP" altLang="en-US" dirty="0"/>
+              <a:t>ゲーム概要</a:t>
+            </a:r>
+            <a:endParaRPr kumimoji="1" lang="ja-JP" altLang="en-US" dirty="0"/>
           </a:p>
         </p:txBody>
       </p:sp>
@@ -4029,316 +4029,6 @@
 </file>
 
 <file path=ppt/slides/slide4.xml><?xml version="1.0" encoding="utf-8"?>
-<p:sld xmlns:a="http://schemas.openxmlformats.org/drawingml/2006/main" xmlns:r="http://schemas.openxmlformats.org/officeDocument/2006/relationships" xmlns:p="http://schemas.openxmlformats.org/presentationml/2006/main">
-  <p:cSld>
-    <p:spTree>
-      <p:nvGrpSpPr>
-        <p:cNvPr id="1" name=""/>
-        <p:cNvGrpSpPr/>
-        <p:nvPr/>
-      </p:nvGrpSpPr>
-      <p:grpSpPr>
-        <a:xfrm>
-          <a:off x="0" y="0"/>
-          <a:ext cx="0" cy="0"/>
-          <a:chOff x="0" y="0"/>
-          <a:chExt cx="0" cy="0"/>
-        </a:xfrm>
-      </p:grpSpPr>
-      <p:sp>
-        <p:nvSpPr>
-          <p:cNvPr id="2" name="タイトル 1">
-            <a:extLst>
-              <a:ext uri="{FF2B5EF4-FFF2-40B4-BE49-F238E27FC236}">
-                <a16:creationId xmlns:a16="http://schemas.microsoft.com/office/drawing/2014/main" id="{39CA8934-30DC-E456-E992-F5323B06B8AF}"/>
-              </a:ext>
-            </a:extLst>
-          </p:cNvPr>
-          <p:cNvSpPr>
-            <a:spLocks noGrp="1"/>
-          </p:cNvSpPr>
-          <p:nvPr>
-            <p:ph type="title"/>
-          </p:nvPr>
-        </p:nvSpPr>
-        <p:spPr/>
-        <p:txBody>
-          <a:bodyPr/>
-          <a:lstStyle/>
-          <a:p>
-            <a:r>
-              <a:rPr kumimoji="1" lang="ja-JP" altLang="en-US" dirty="0"/>
-              <a:t>操作</a:t>
-            </a:r>
-            <a:r>
-              <a:rPr kumimoji="1" lang="en-US" altLang="ja-JP" dirty="0"/>
-              <a:t>(</a:t>
-            </a:r>
-            <a:r>
-              <a:rPr kumimoji="1" lang="ja-JP" altLang="en-US" dirty="0"/>
-              <a:t>ソロ</a:t>
-            </a:r>
-            <a:r>
-              <a:rPr kumimoji="1" lang="en-US" altLang="ja-JP" dirty="0"/>
-              <a:t>)</a:t>
-            </a:r>
-            <a:endParaRPr kumimoji="1" lang="ja-JP" altLang="en-US" dirty="0"/>
-          </a:p>
-        </p:txBody>
-      </p:sp>
-      <p:sp>
-        <p:nvSpPr>
-          <p:cNvPr id="3" name="コンテンツ プレースホルダー 2">
-            <a:extLst>
-              <a:ext uri="{FF2B5EF4-FFF2-40B4-BE49-F238E27FC236}">
-                <a16:creationId xmlns:a16="http://schemas.microsoft.com/office/drawing/2014/main" id="{1E39C64A-BCD0-D9F3-D080-0B41A2721407}"/>
-              </a:ext>
-            </a:extLst>
-          </p:cNvPr>
-          <p:cNvSpPr>
-            <a:spLocks noGrp="1"/>
-          </p:cNvSpPr>
-          <p:nvPr>
-            <p:ph idx="1"/>
-          </p:nvPr>
-        </p:nvSpPr>
-        <p:spPr/>
-        <p:txBody>
-          <a:bodyPr/>
-          <a:lstStyle/>
-          <a:p>
-            <a:r>
-              <a:rPr kumimoji="1" lang="ja-JP" altLang="en-US" dirty="0"/>
-              <a:t>移動</a:t>
-            </a:r>
-            <a:r>
-              <a:rPr kumimoji="1" lang="en-US" altLang="ja-JP" dirty="0"/>
-              <a:t>:</a:t>
-            </a:r>
-            <a:r>
-              <a:rPr kumimoji="1" lang="ja-JP" altLang="en-US" dirty="0"/>
-              <a:t>自動</a:t>
-            </a:r>
-            <a:endParaRPr kumimoji="1" lang="en-US" altLang="ja-JP" dirty="0"/>
-          </a:p>
-          <a:p>
-            <a:r>
-              <a:rPr lang="ja-JP" altLang="en-US" dirty="0"/>
-              <a:t>方向転換</a:t>
-            </a:r>
-            <a:r>
-              <a:rPr lang="en-US" altLang="ja-JP" dirty="0" smtClean="0"/>
-              <a:t>:</a:t>
-            </a:r>
-            <a:r>
-              <a:rPr lang="ja-JP" altLang="en-US" dirty="0" smtClean="0"/>
-              <a:t>スペース</a:t>
-            </a:r>
-            <a:endParaRPr lang="en-US" altLang="ja-JP" dirty="0" smtClean="0"/>
-          </a:p>
-          <a:p>
-            <a:r>
-              <a:rPr kumimoji="1" lang="ja-JP" altLang="en-US" dirty="0" smtClean="0"/>
-              <a:t>ダッシュ：シフト</a:t>
-            </a:r>
-            <a:endParaRPr kumimoji="1" lang="ja-JP" altLang="en-US" dirty="0"/>
-          </a:p>
-        </p:txBody>
-      </p:sp>
-    </p:spTree>
-    <p:extLst>
-      <p:ext uri="{BB962C8B-B14F-4D97-AF65-F5344CB8AC3E}">
-        <p14:creationId xmlns:p14="http://schemas.microsoft.com/office/powerpoint/2010/main" val="291060366"/>
-      </p:ext>
-    </p:extLst>
-  </p:cSld>
-  <p:clrMapOvr>
-    <a:masterClrMapping/>
-  </p:clrMapOvr>
-</p:sld>
-</file>
-
-<file path=ppt/slides/slide5.xml><?xml version="1.0" encoding="utf-8"?>
-<p:sld xmlns:a="http://schemas.openxmlformats.org/drawingml/2006/main" xmlns:r="http://schemas.openxmlformats.org/officeDocument/2006/relationships" xmlns:p="http://schemas.openxmlformats.org/presentationml/2006/main">
-  <p:cSld>
-    <p:spTree>
-      <p:nvGrpSpPr>
-        <p:cNvPr id="1" name="">
-          <a:extLst>
-            <a:ext uri="{FF2B5EF4-FFF2-40B4-BE49-F238E27FC236}">
-              <a16:creationId xmlns:a16="http://schemas.microsoft.com/office/drawing/2014/main" id="{4195F727-D108-E2EA-4C01-082F2478C681}"/>
-            </a:ext>
-          </a:extLst>
-        </p:cNvPr>
-        <p:cNvGrpSpPr/>
-        <p:nvPr/>
-      </p:nvGrpSpPr>
-      <p:grpSpPr>
-        <a:xfrm>
-          <a:off x="0" y="0"/>
-          <a:ext cx="0" cy="0"/>
-          <a:chOff x="0" y="0"/>
-          <a:chExt cx="0" cy="0"/>
-        </a:xfrm>
-      </p:grpSpPr>
-      <p:sp>
-        <p:nvSpPr>
-          <p:cNvPr id="2" name="タイトル 1">
-            <a:extLst>
-              <a:ext uri="{FF2B5EF4-FFF2-40B4-BE49-F238E27FC236}">
-                <a16:creationId xmlns:a16="http://schemas.microsoft.com/office/drawing/2014/main" id="{2A8A545A-5E17-0DCA-0D2D-34797BBD4420}"/>
-              </a:ext>
-            </a:extLst>
-          </p:cNvPr>
-          <p:cNvSpPr>
-            <a:spLocks noGrp="1"/>
-          </p:cNvSpPr>
-          <p:nvPr>
-            <p:ph type="title"/>
-          </p:nvPr>
-        </p:nvSpPr>
-        <p:spPr/>
-        <p:txBody>
-          <a:bodyPr/>
-          <a:lstStyle/>
-          <a:p>
-            <a:r>
-              <a:rPr kumimoji="1" lang="ja-JP" altLang="en-US" dirty="0"/>
-              <a:t>操作</a:t>
-            </a:r>
-            <a:r>
-              <a:rPr kumimoji="1" lang="en-US" altLang="ja-JP" dirty="0"/>
-              <a:t>(</a:t>
-            </a:r>
-            <a:r>
-              <a:rPr lang="ja-JP" altLang="en-US" dirty="0"/>
-              <a:t>マルチ</a:t>
-            </a:r>
-            <a:r>
-              <a:rPr kumimoji="1" lang="en-US" altLang="ja-JP" dirty="0"/>
-              <a:t>)</a:t>
-            </a:r>
-            <a:endParaRPr kumimoji="1" lang="ja-JP" altLang="en-US" dirty="0"/>
-          </a:p>
-        </p:txBody>
-      </p:sp>
-      <p:sp>
-        <p:nvSpPr>
-          <p:cNvPr id="3" name="コンテンツ プレースホルダー 2">
-            <a:extLst>
-              <a:ext uri="{FF2B5EF4-FFF2-40B4-BE49-F238E27FC236}">
-                <a16:creationId xmlns:a16="http://schemas.microsoft.com/office/drawing/2014/main" id="{30FDFB4A-C083-28BE-B213-1AE9ED3CABD9}"/>
-              </a:ext>
-            </a:extLst>
-          </p:cNvPr>
-          <p:cNvSpPr>
-            <a:spLocks noGrp="1"/>
-          </p:cNvSpPr>
-          <p:nvPr>
-            <p:ph idx="1"/>
-          </p:nvPr>
-        </p:nvSpPr>
-        <p:spPr/>
-        <p:txBody>
-          <a:bodyPr/>
-          <a:lstStyle/>
-          <a:p>
-            <a:r>
-              <a:rPr kumimoji="1" lang="ja-JP" altLang="en-US" dirty="0"/>
-              <a:t>移動</a:t>
-            </a:r>
-            <a:r>
-              <a:rPr kumimoji="1" lang="en-US" altLang="ja-JP" dirty="0"/>
-              <a:t>:</a:t>
-            </a:r>
-            <a:r>
-              <a:rPr kumimoji="1" lang="ja-JP" altLang="en-US" dirty="0"/>
-              <a:t>自動</a:t>
-            </a:r>
-            <a:endParaRPr kumimoji="1" lang="en-US" altLang="ja-JP" dirty="0"/>
-          </a:p>
-          <a:p>
-            <a:r>
-              <a:rPr lang="ja-JP" altLang="en-US" dirty="0"/>
-              <a:t>方向転換</a:t>
-            </a:r>
-            <a:r>
-              <a:rPr lang="en-US" altLang="ja-JP" dirty="0" smtClean="0"/>
-              <a:t>:</a:t>
-            </a:r>
-            <a:r>
-              <a:rPr lang="ja-JP" altLang="en-US" dirty="0" smtClean="0"/>
-              <a:t>スペース</a:t>
-            </a:r>
-            <a:r>
-              <a:rPr lang="en-US" altLang="ja-JP" dirty="0" smtClean="0"/>
-              <a:t>(P1)</a:t>
-            </a:r>
-            <a:r>
-              <a:rPr lang="ja-JP" altLang="en-US" dirty="0" smtClean="0"/>
-              <a:t>左クリック</a:t>
-            </a:r>
-            <a:r>
-              <a:rPr lang="en-US" altLang="ja-JP" dirty="0" smtClean="0"/>
-              <a:t>(P2)</a:t>
-            </a:r>
-            <a:endParaRPr lang="en-US" altLang="ja-JP" dirty="0"/>
-          </a:p>
-          <a:p>
-            <a:r>
-              <a:rPr lang="ja-JP" altLang="en-US" dirty="0" smtClean="0">
-                <a:sym typeface="Wingdings" panose="05000000000000000000" pitchFamily="2" charset="2"/>
-              </a:rPr>
-              <a:t>ダッシュ</a:t>
-            </a:r>
-            <a:r>
-              <a:rPr lang="en-US" altLang="ja-JP" dirty="0" smtClean="0">
-                <a:sym typeface="Wingdings" panose="05000000000000000000" pitchFamily="2" charset="2"/>
-              </a:rPr>
-              <a:t>:</a:t>
-            </a:r>
-            <a:r>
-              <a:rPr lang="ja-JP" altLang="en-US" dirty="0" smtClean="0">
-                <a:sym typeface="Wingdings" panose="05000000000000000000" pitchFamily="2" charset="2"/>
-              </a:rPr>
-              <a:t>シフト</a:t>
-            </a:r>
-            <a:r>
-              <a:rPr lang="en-US" altLang="ja-JP" dirty="0" smtClean="0">
-                <a:sym typeface="Wingdings" panose="05000000000000000000" pitchFamily="2" charset="2"/>
-              </a:rPr>
-              <a:t>(P1)</a:t>
-            </a:r>
-            <a:r>
-              <a:rPr lang="ja-JP" altLang="en-US" dirty="0" smtClean="0">
-                <a:sym typeface="Wingdings" panose="05000000000000000000" pitchFamily="2" charset="2"/>
-              </a:rPr>
-              <a:t>右クリック</a:t>
-            </a:r>
-            <a:r>
-              <a:rPr lang="en-US" altLang="ja-JP" dirty="0" smtClean="0">
-                <a:sym typeface="Wingdings" panose="05000000000000000000" pitchFamily="2" charset="2"/>
-              </a:rPr>
-              <a:t>(P2)</a:t>
-            </a:r>
-            <a:endParaRPr kumimoji="1" lang="ja-JP" altLang="en-US" dirty="0"/>
-          </a:p>
-        </p:txBody>
-      </p:sp>
-    </p:spTree>
-    <p:extLst>
-      <p:ext uri="{BB962C8B-B14F-4D97-AF65-F5344CB8AC3E}">
-        <p14:creationId xmlns:p14="http://schemas.microsoft.com/office/powerpoint/2010/main" val="803344093"/>
-      </p:ext>
-    </p:extLst>
-  </p:cSld>
-  <p:clrMapOvr>
-    <a:masterClrMapping/>
-  </p:clrMapOvr>
-</p:sld>
-</file>
-
-<file path=ppt/slides/slide6.xml><?xml version="1.0" encoding="utf-8"?>
 <p:sld xmlns:a="http://schemas.openxmlformats.org/drawingml/2006/main" xmlns:r="http://schemas.openxmlformats.org/officeDocument/2006/relationships" xmlns:p="http://schemas.openxmlformats.org/presentationml/2006/main">
   <p:cSld>
     <p:spTree>

--- a/チーム制作.pptx
+++ b/チーム制作.pptx
@@ -3639,9 +3639,10 @@
           <a:lstStyle/>
           <a:p>
             <a:r>
-              <a:rPr kumimoji="1" lang="ja-JP" altLang="en-US" dirty="0"/>
-              <a:t>チーム制作</a:t>
-            </a:r>
+              <a:rPr kumimoji="1" lang="ja-JP" altLang="en-US" dirty="0" smtClean="0"/>
+              <a:t>企画書</a:t>
+            </a:r>
+            <a:endParaRPr kumimoji="1" lang="ja-JP" altLang="en-US" dirty="0"/>
           </a:p>
         </p:txBody>
       </p:sp>
@@ -3759,21 +3760,30 @@
             </a:r>
             <a:r>
               <a:rPr kumimoji="1" lang="en-US" altLang="ja-JP" dirty="0"/>
-              <a:t>:Unity</a:t>
-            </a:r>
+              <a:t>:</a:t>
+            </a:r>
+            <a:r>
+              <a:rPr kumimoji="1" lang="en-US" altLang="ja-JP" dirty="0" smtClean="0"/>
+              <a:t>Unity2D</a:t>
+            </a:r>
+            <a:endParaRPr kumimoji="1" lang="en-US" altLang="ja-JP" dirty="0"/>
           </a:p>
           <a:p>
             <a:r>
               <a:rPr lang="ja-JP" altLang="en-US" dirty="0"/>
-              <a:t>制作人数</a:t>
-            </a:r>
-            <a:r>
-              <a:rPr lang="en-US" altLang="ja-JP" dirty="0"/>
-              <a:t>:4</a:t>
-            </a:r>
-            <a:r>
-              <a:rPr lang="ja-JP" altLang="en-US" dirty="0"/>
-              <a:t>人</a:t>
+              <a:t>プレイ</a:t>
+            </a:r>
+            <a:r>
+              <a:rPr lang="ja-JP" altLang="en-US" dirty="0" smtClean="0"/>
+              <a:t>人数</a:t>
+            </a:r>
+            <a:r>
+              <a:rPr lang="en-US" altLang="ja-JP" dirty="0" smtClean="0"/>
+              <a:t>:</a:t>
+            </a:r>
+            <a:r>
+              <a:rPr lang="ja-JP" altLang="en-US" dirty="0" smtClean="0"/>
+              <a:t>１～２人</a:t>
             </a:r>
             <a:endParaRPr lang="en-US" altLang="ja-JP" dirty="0"/>
           </a:p>
@@ -3783,19 +3793,19 @@
               <a:t>ジャンル</a:t>
             </a:r>
             <a:r>
-              <a:rPr kumimoji="1" lang="en-US" altLang="ja-JP" dirty="0"/>
+              <a:rPr kumimoji="1" lang="en-US" altLang="ja-JP" dirty="0" smtClean="0"/>
               <a:t>:</a:t>
             </a:r>
             <a:r>
-              <a:rPr kumimoji="1" lang="ja-JP" altLang="en-US" dirty="0"/>
+              <a:rPr kumimoji="1" lang="ja-JP" altLang="en-US" dirty="0" smtClean="0"/>
               <a:t>オート</a:t>
             </a:r>
             <a:r>
-              <a:rPr lang="ja-JP" altLang="ja-JP" dirty="0"/>
+              <a:rPr lang="ja-JP" altLang="ja-JP" dirty="0" smtClean="0"/>
               <a:t>スクロール</a:t>
             </a:r>
             <a:r>
-              <a:rPr lang="ja-JP" altLang="en-US" dirty="0"/>
+              <a:rPr lang="ja-JP" altLang="en-US" dirty="0" smtClean="0"/>
               <a:t>型</a:t>
             </a:r>
             <a:r>
@@ -3836,6 +3846,36 @@
           <a:chExt cx="0" cy="0"/>
         </a:xfrm>
       </p:grpSpPr>
+      <p:pic>
+        <p:nvPicPr>
+          <p:cNvPr id="4" name="図 3"/>
+          <p:cNvPicPr>
+            <a:picLocks noChangeAspect="1"/>
+          </p:cNvPicPr>
+          <p:nvPr/>
+        </p:nvPicPr>
+        <p:blipFill>
+          <a:blip r:embed="rId2">
+            <a:extLst>
+              <a:ext uri="{28A0092B-C50C-407E-A947-70E740481C1C}">
+                <a14:useLocalDpi xmlns:a14="http://schemas.microsoft.com/office/drawing/2010/main" val="0"/>
+              </a:ext>
+            </a:extLst>
+          </a:blip>
+          <a:stretch>
+            <a:fillRect/>
+          </a:stretch>
+        </p:blipFill>
+        <p:spPr>
+          <a:xfrm>
+            <a:off x="8549196" y="3693110"/>
+            <a:ext cx="3642804" cy="3098307"/>
+          </a:xfrm>
+          <a:prstGeom prst="rect">
+            <a:avLst/>
+          </a:prstGeom>
+        </p:spPr>
+      </p:pic>
       <p:sp>
         <p:nvSpPr>
           <p:cNvPr id="2" name="タイトル 1">
@@ -3945,15 +3985,7 @@
             </a:r>
             <a:r>
               <a:rPr lang="ja-JP" altLang="en-US" dirty="0" smtClean="0"/>
-              <a:t>時点</a:t>
-            </a:r>
-            <a:r>
-              <a:rPr lang="ja-JP" altLang="en-US" dirty="0" smtClean="0"/>
-              <a:t>の</a:t>
-            </a:r>
-            <a:r>
-              <a:rPr lang="ja-JP" altLang="en-US" dirty="0" smtClean="0"/>
-              <a:t>スコアが記録される</a:t>
+              <a:t>時点のスコアが記録される</a:t>
             </a:r>
             <a:r>
               <a:rPr lang="en-US" altLang="ja-JP" dirty="0" smtClean="0"/>
@@ -3975,9 +4007,9 @@
           <a:p>
             <a:r>
               <a:rPr kumimoji="1" lang="ja-JP" altLang="en-US" dirty="0" smtClean="0"/>
-              <a:t>マルチ</a:t>
-            </a:r>
-            <a:endParaRPr lang="en-US" altLang="ja-JP" dirty="0"/>
+              <a:t>対戦</a:t>
+            </a:r>
+            <a:endParaRPr kumimoji="1" lang="en-US" altLang="ja-JP" dirty="0" smtClean="0"/>
           </a:p>
           <a:p>
             <a:pPr marL="0" indent="0">
@@ -3985,7 +4017,25 @@
             </a:pPr>
             <a:r>
               <a:rPr lang="ja-JP" altLang="en-US" dirty="0"/>
-              <a:t>プレイヤー同士がぶつかる</a:t>
+              <a:t>障害物に当たったら</a:t>
+            </a:r>
+            <a:r>
+              <a:rPr lang="ja-JP" altLang="en-US" dirty="0" smtClean="0"/>
+              <a:t>敗北</a:t>
+            </a:r>
+            <a:endParaRPr kumimoji="1" lang="en-US" altLang="ja-JP" dirty="0" smtClean="0"/>
+          </a:p>
+          <a:p>
+            <a:pPr marL="0" indent="0">
+              <a:buNone/>
+            </a:pPr>
+            <a:r>
+              <a:rPr lang="ja-JP" altLang="en-US" dirty="0" smtClean="0"/>
+              <a:t>プレイヤー</a:t>
+            </a:r>
+            <a:r>
+              <a:rPr lang="ja-JP" altLang="en-US" dirty="0"/>
+              <a:t>同士がぶつかる</a:t>
             </a:r>
             <a:r>
               <a:rPr lang="ja-JP" altLang="en-US" dirty="0" smtClean="0"/>
@@ -3998,20 +4048,18 @@
               <a:buNone/>
             </a:pPr>
             <a:r>
+              <a:rPr lang="ja-JP" altLang="en-US" u="sng" dirty="0" smtClean="0"/>
+              <a:t>ダッシュ</a:t>
+            </a:r>
+            <a:r>
               <a:rPr lang="ja-JP" altLang="en-US" dirty="0" smtClean="0"/>
-              <a:t>ダッシュ時は相手が大きくノックバックする</a:t>
+              <a:t>時は相手が大きくノックバック</a:t>
+            </a:r>
+            <a:r>
+              <a:rPr lang="ja-JP" altLang="en-US" dirty="0" smtClean="0"/>
+              <a:t>する</a:t>
             </a:r>
             <a:endParaRPr lang="en-US" altLang="ja-JP" dirty="0" smtClean="0"/>
-          </a:p>
-          <a:p>
-            <a:pPr marL="0" indent="0">
-              <a:buNone/>
-            </a:pPr>
-            <a:r>
-              <a:rPr lang="ja-JP" altLang="en-US" dirty="0" smtClean="0"/>
-              <a:t>お互いフェイントをかけあって相手を障害物に当てたら勝ち</a:t>
-            </a:r>
-            <a:endParaRPr lang="en-US" altLang="ja-JP" dirty="0"/>
           </a:p>
         </p:txBody>
       </p:sp>
